--- a/Predavanja/Predavanje_07_Ne_sive_atm.pptx
+++ b/Predavanja/Predavanje_07_Ne_sive_atm.pptx
@@ -7117,7 +7117,7 @@
               <a:rPr lang="en-US" sz="2000" dirty="0">
                 <a:latin typeface="Rubik" pitchFamily="18"/>
               </a:rPr>
-              <a:t>13/11/2024</a:t>
+              <a:t>30/12/2025</a:t>
             </a:r>
           </a:p>
         </p:txBody>
